--- a/AI_Presentation_Group 20.pptx
+++ b/AI_Presentation_Group 20.pptx
@@ -1003,8 +1003,8 @@
         </p:nvSpPr>
         <p:spPr>
           <a:xfrm>
-            <a:off x="1143225" y="685800"/>
-            <a:ext cx="4572225" cy="3429000"/>
+            <a:off x="381000" y="685800"/>
+            <a:ext cx="6096000" cy="3429000"/>
           </a:xfrm>
           <a:custGeom>
             <a:avLst/>
@@ -1939,8 +1939,8 @@
         </p:nvSpPr>
         <p:spPr>
           <a:xfrm>
-            <a:off x="1143225" y="685800"/>
-            <a:ext cx="4572300" cy="3429000"/>
+            <a:off x="381000" y="685800"/>
+            <a:ext cx="6096000" cy="3429000"/>
           </a:xfrm>
           <a:custGeom>
             <a:avLst/>
@@ -12088,7 +12088,7 @@
 </file>
 
 <file path=ppt/slides/slide10.xml><?xml version="1.0" encoding="utf-8"?>
-<p:sld xmlns:a="http://schemas.openxmlformats.org/drawingml/2006/main" xmlns:r="http://schemas.openxmlformats.org/officeDocument/2006/relationships" xmlns:p="http://schemas.openxmlformats.org/presentationml/2006/main">
+<p:sld xmlns:a="http://schemas.openxmlformats.org/drawingml/2006/main" xmlns:r="http://schemas.openxmlformats.org/officeDocument/2006/relationships" xmlns:p="http://schemas.openxmlformats.org/presentationml/2006/main" show="0">
   <p:cSld>
     <p:bg>
       <p:bgPr>
@@ -13100,7 +13100,7 @@
         </p:nvSpPr>
         <p:spPr>
           <a:xfrm>
-            <a:off x="4000202" y="2377380"/>
+            <a:off x="3986950" y="2822430"/>
             <a:ext cx="4401300" cy="831300"/>
           </a:xfrm>
           <a:prstGeom prst="rect">
@@ -13127,7 +13127,7 @@
               <a:buNone/>
             </a:pPr>
             <a:r>
-              <a:rPr lang="en-US" sz="5400" b="1">
+              <a:rPr lang="en-US" sz="5400" b="1" dirty="0">
                 <a:solidFill>
                   <a:srgbClr val="FCFAF0"/>
                 </a:solidFill>
@@ -13139,7 +13139,7 @@
               <a:t>5</a:t>
             </a:r>
             <a:r>
-              <a:rPr lang="en-US" sz="5400" b="1" i="0" u="none" strike="noStrike" cap="none">
+              <a:rPr lang="en-US" sz="5400" b="1" i="0" u="none" strike="noStrike" cap="none" dirty="0">
                 <a:solidFill>
                   <a:srgbClr val="FCFAF0"/>
                 </a:solidFill>
@@ -13148,9 +13148,21 @@
                 <a:cs typeface="Poppins"/>
                 <a:sym typeface="Poppins"/>
               </a:rPr>
-              <a:t>. 總結與展望</a:t>
+              <a:t>. </a:t>
             </a:r>
-            <a:endParaRPr/>
+            <a:r>
+              <a:rPr lang="en-US" sz="5400" b="1" i="0" u="none" strike="noStrike" cap="none" dirty="0" err="1">
+                <a:solidFill>
+                  <a:srgbClr val="FCFAF0"/>
+                </a:solidFill>
+                <a:latin typeface="Poppins"/>
+                <a:ea typeface="Poppins"/>
+                <a:cs typeface="Poppins"/>
+                <a:sym typeface="Poppins"/>
+              </a:rPr>
+              <a:t>總結與展望</a:t>
+            </a:r>
+            <a:endParaRPr dirty="0"/>
           </a:p>
         </p:txBody>
       </p:sp>
@@ -13162,7 +13174,7 @@
         </p:nvSpPr>
         <p:spPr>
           <a:xfrm>
-            <a:off x="5664398" y="3577530"/>
+            <a:off x="5711350" y="3853755"/>
             <a:ext cx="952500" cy="76200"/>
           </a:xfrm>
           <a:prstGeom prst="rect">
@@ -16045,14 +16057,14 @@
       </p:pic>
       <p:sp>
         <p:nvSpPr>
-          <p:cNvPr id="154" name="Google Shape;154;p18"/>
+          <p:cNvPr id="155" name="Google Shape;155;p18"/>
           <p:cNvSpPr txBox="1"/>
           <p:nvPr/>
         </p:nvSpPr>
         <p:spPr>
           <a:xfrm>
-            <a:off x="1193100" y="2057795"/>
-            <a:ext cx="7875300" cy="462900"/>
+            <a:off x="1193100" y="2662683"/>
+            <a:ext cx="7500300" cy="1057725"/>
           </a:xfrm>
           <a:prstGeom prst="rect">
             <a:avLst/>
@@ -16068,70 +16080,13 @@
           </a:bodyPr>
           <a:lstStyle/>
           <a:p>
-            <a:pPr marL="0" marR="0" lvl="0" indent="0" algn="l" rtl="0">
-              <a:spcBef>
-                <a:spcPts val="0"/>
-              </a:spcBef>
-              <a:spcAft>
-                <a:spcPts val="0"/>
-              </a:spcAft>
-              <a:buNone/>
-            </a:pPr>
-            <a:r>
-              <a:rPr lang="en-US" sz="3007" b="1" i="0" u="none" strike="noStrike" cap="none">
-                <a:solidFill>
-                  <a:srgbClr val="E67E22"/>
-                </a:solidFill>
-                <a:latin typeface="Poppins"/>
-                <a:ea typeface="Poppins"/>
-                <a:cs typeface="Poppins"/>
-                <a:sym typeface="Poppins"/>
-              </a:rPr>
-              <a:t>量化＋質化 = 精準推薦</a:t>
-            </a:r>
-            <a:endParaRPr sz="2004"/>
-          </a:p>
-        </p:txBody>
-      </p:sp>
-      <p:sp>
-        <p:nvSpPr>
-          <p:cNvPr id="155" name="Google Shape;155;p18"/>
-          <p:cNvSpPr txBox="1"/>
-          <p:nvPr/>
-        </p:nvSpPr>
-        <p:spPr>
-          <a:xfrm>
-            <a:off x="1193100" y="2739626"/>
-            <a:ext cx="7500300" cy="859500"/>
-          </a:xfrm>
-          <a:prstGeom prst="rect">
-            <a:avLst/>
-          </a:prstGeom>
-          <a:noFill/>
-          <a:ln>
-            <a:noFill/>
-          </a:ln>
-        </p:spPr>
-        <p:txBody>
-          <a:bodyPr spcFirstLastPara="1" wrap="square" lIns="0" tIns="0" rIns="0" bIns="0" anchor="t" anchorCtr="0">
-            <a:spAutoFit/>
-          </a:bodyPr>
-          <a:lstStyle/>
-          <a:p>
-            <a:pPr marL="0" marR="0" lvl="0" indent="0" algn="l" rtl="0">
+            <a:pPr lvl="0">
               <a:lnSpc>
                 <a:spcPct val="160000"/>
               </a:lnSpc>
-              <a:spcBef>
-                <a:spcPts val="0"/>
-              </a:spcBef>
-              <a:spcAft>
-                <a:spcPts val="0"/>
-              </a:spcAft>
-              <a:buNone/>
             </a:pPr>
             <a:r>
-              <a:rPr lang="en-US" sz="2148" b="1" i="0" u="none" strike="noStrike" cap="none">
+              <a:rPr lang="en-US" sz="2148" b="1" i="0" u="none" strike="noStrike" cap="none" dirty="0" err="1">
                 <a:solidFill>
                   <a:srgbClr val="334155"/>
                 </a:solidFill>
@@ -16140,10 +16095,10 @@
                 <a:cs typeface="Lato"/>
                 <a:sym typeface="Lato"/>
               </a:rPr>
-              <a:t>階段一：</a:t>
+              <a:t>階段一</a:t>
             </a:r>
             <a:r>
-              <a:rPr lang="en-US" sz="2148" b="0" i="0" u="none" strike="noStrike" cap="none">
+              <a:rPr lang="en-US" sz="2148" b="1" i="0" u="none" strike="noStrike" cap="none" dirty="0">
                 <a:solidFill>
                   <a:srgbClr val="334155"/>
                 </a:solidFill>
@@ -16152,9 +16107,81 @@
                 <a:cs typeface="Lato"/>
                 <a:sym typeface="Lato"/>
               </a:rPr>
-              <a:t> 通過 10 題利克特五分量表初步定位情緒維度（如：疲憊度、冒險意願）。</a:t>
+              <a:t>：</a:t>
             </a:r>
-            <a:endParaRPr sz="2004"/>
+            <a:r>
+              <a:rPr lang="en-US" sz="2148" b="0" i="0" u="none" strike="noStrike" cap="none" dirty="0">
+                <a:solidFill>
+                  <a:srgbClr val="334155"/>
+                </a:solidFill>
+                <a:latin typeface="Lato"/>
+                <a:ea typeface="Lato"/>
+                <a:cs typeface="Lato"/>
+                <a:sym typeface="Lato"/>
+              </a:rPr>
+              <a:t> </a:t>
+            </a:r>
+            <a:r>
+              <a:rPr lang="en-US" sz="2148" b="0" i="0" u="none" strike="noStrike" cap="none" dirty="0" err="1">
+                <a:solidFill>
+                  <a:srgbClr val="334155"/>
+                </a:solidFill>
+                <a:latin typeface="Lato"/>
+                <a:ea typeface="Lato"/>
+                <a:cs typeface="Lato"/>
+                <a:sym typeface="Lato"/>
+              </a:rPr>
+              <a:t>通過</a:t>
+            </a:r>
+            <a:r>
+              <a:rPr lang="en-US" sz="2148" b="0" i="0" u="none" strike="noStrike" cap="none" dirty="0">
+                <a:solidFill>
+                  <a:srgbClr val="334155"/>
+                </a:solidFill>
+                <a:latin typeface="Lato"/>
+                <a:ea typeface="Lato"/>
+                <a:cs typeface="Lato"/>
+                <a:sym typeface="Lato"/>
+              </a:rPr>
+              <a:t> 10 題</a:t>
+            </a:r>
+            <a:r>
+              <a:rPr lang="zh-TW" altLang="en-US" sz="2148" dirty="0">
+                <a:solidFill>
+                  <a:srgbClr val="334155"/>
+                </a:solidFill>
+                <a:latin typeface="Lato"/>
+                <a:ea typeface="Lato"/>
+                <a:cs typeface="Lato"/>
+                <a:sym typeface="Lato"/>
+              </a:rPr>
+              <a:t>里克特五分量表</a:t>
+            </a:r>
+            <a:r>
+              <a:rPr lang="en-US" sz="2148" b="0" i="0" u="none" strike="noStrike" cap="none" dirty="0" err="1">
+                <a:solidFill>
+                  <a:srgbClr val="334155"/>
+                </a:solidFill>
+                <a:latin typeface="Lato"/>
+                <a:ea typeface="Lato"/>
+                <a:cs typeface="Lato"/>
+                <a:sym typeface="Lato"/>
+              </a:rPr>
+              <a:t>初步定位情緒維度（如：疲憊度、冒險意願</a:t>
+            </a:r>
+            <a:r>
+              <a:rPr lang="en-US" sz="2148" b="0" i="0" u="none" strike="noStrike" cap="none" dirty="0">
+                <a:solidFill>
+                  <a:srgbClr val="334155"/>
+                </a:solidFill>
+                <a:latin typeface="Lato"/>
+                <a:ea typeface="Lato"/>
+                <a:cs typeface="Lato"/>
+                <a:sym typeface="Lato"/>
+              </a:rPr>
+              <a:t>）。</a:t>
+            </a:r>
+            <a:endParaRPr sz="2004" dirty="0"/>
           </a:p>
         </p:txBody>
       </p:sp>
@@ -16166,7 +16193,7 @@
         </p:nvSpPr>
         <p:spPr>
           <a:xfrm>
-            <a:off x="1193100" y="3776008"/>
+            <a:off x="1193100" y="3753678"/>
             <a:ext cx="7500300" cy="859500"/>
           </a:xfrm>
           <a:prstGeom prst="rect">
@@ -16440,7 +16467,7 @@
         </p:nvSpPr>
         <p:spPr>
           <a:xfrm>
-            <a:off x="857250" y="476250"/>
+            <a:off x="990600" y="786189"/>
             <a:ext cx="11201400" cy="485775"/>
           </a:xfrm>
           <a:prstGeom prst="rect">
@@ -16467,7 +16494,7 @@
               <a:buNone/>
             </a:pPr>
             <a:r>
-              <a:rPr lang="en-US" sz="2850" b="1" i="0" u="none" strike="noStrike" cap="none">
+              <a:rPr lang="en-US" sz="2850" b="1" i="0" u="none" strike="noStrike" cap="none" dirty="0">
                 <a:solidFill>
                   <a:srgbClr val="052C52"/>
                 </a:solidFill>
@@ -16476,9 +16503,21 @@
                 <a:cs typeface="Poppins"/>
                 <a:sym typeface="Poppins"/>
               </a:rPr>
-              <a:t>AI 心情判斷引擎邏輯</a:t>
+              <a:t>AI </a:t>
             </a:r>
-            <a:endParaRPr/>
+            <a:r>
+              <a:rPr lang="en-US" sz="2850" b="1" i="0" u="none" strike="noStrike" cap="none" dirty="0" err="1">
+                <a:solidFill>
+                  <a:srgbClr val="052C52"/>
+                </a:solidFill>
+                <a:latin typeface="Poppins"/>
+                <a:ea typeface="Poppins"/>
+                <a:cs typeface="Poppins"/>
+                <a:sym typeface="Poppins"/>
+              </a:rPr>
+              <a:t>心情判斷引擎邏輯</a:t>
+            </a:r>
+            <a:endParaRPr dirty="0"/>
           </a:p>
         </p:txBody>
       </p:sp>
@@ -16490,7 +16529,7 @@
         </p:nvSpPr>
         <p:spPr>
           <a:xfrm>
-            <a:off x="666750" y="476250"/>
+            <a:off x="713133" y="785675"/>
             <a:ext cx="95250" cy="485775"/>
           </a:xfrm>
           <a:prstGeom prst="rect">
@@ -16527,6 +16566,99 @@
               <a:cs typeface="Calibri"/>
               <a:sym typeface="Calibri"/>
             </a:endParaRPr>
+          </a:p>
+        </p:txBody>
+      </p:sp>
+      <p:pic>
+        <p:nvPicPr>
+          <p:cNvPr id="3" name="圖片 2">
+            <a:extLst>
+              <a:ext uri="{FF2B5EF4-FFF2-40B4-BE49-F238E27FC236}">
+                <a16:creationId xmlns:a16="http://schemas.microsoft.com/office/drawing/2014/main" id="{477CB756-94F8-77D2-035B-49250D8D2ACB}"/>
+              </a:ext>
+            </a:extLst>
+          </p:cNvPr>
+          <p:cNvPicPr>
+            <a:picLocks noChangeAspect="1"/>
+          </p:cNvPicPr>
+          <p:nvPr/>
+        </p:nvPicPr>
+        <p:blipFill>
+          <a:blip r:embed="rId4"/>
+          <a:srcRect t="25158" b="13106"/>
+          <a:stretch>
+            <a:fillRect/>
+          </a:stretch>
+        </p:blipFill>
+        <p:spPr>
+          <a:xfrm>
+            <a:off x="4689199" y="565388"/>
+            <a:ext cx="7067550" cy="2064026"/>
+          </a:xfrm>
+          <a:prstGeom prst="rect">
+            <a:avLst/>
+          </a:prstGeom>
+        </p:spPr>
+      </p:pic>
+      <p:sp>
+        <p:nvSpPr>
+          <p:cNvPr id="8" name="箭號: 向右 7">
+            <a:extLst>
+              <a:ext uri="{FF2B5EF4-FFF2-40B4-BE49-F238E27FC236}">
+                <a16:creationId xmlns:a16="http://schemas.microsoft.com/office/drawing/2014/main" id="{923F251A-3BA4-0D2C-CE2C-96E98CA36228}"/>
+              </a:ext>
+            </a:extLst>
+          </p:cNvPr>
+          <p:cNvSpPr/>
+          <p:nvPr/>
+        </p:nvSpPr>
+        <p:spPr>
+          <a:xfrm rot="19131688">
+            <a:off x="4222680" y="2175250"/>
+            <a:ext cx="536714" cy="485775"/>
+          </a:xfrm>
+          <a:prstGeom prst="rightArrow">
+            <a:avLst>
+              <a:gd name="adj1" fmla="val 50000"/>
+              <a:gd name="adj2" fmla="val 75916"/>
+            </a:avLst>
+          </a:prstGeom>
+          <a:solidFill>
+            <a:schemeClr val="accent6">
+              <a:lumMod val="20000"/>
+              <a:lumOff val="80000"/>
+            </a:schemeClr>
+          </a:solidFill>
+          <a:ln>
+            <a:solidFill>
+              <a:schemeClr val="accent6">
+                <a:lumMod val="75000"/>
+              </a:schemeClr>
+            </a:solidFill>
+          </a:ln>
+        </p:spPr>
+        <p:style>
+          <a:lnRef idx="2">
+            <a:schemeClr val="accent1">
+              <a:shade val="15000"/>
+            </a:schemeClr>
+          </a:lnRef>
+          <a:fillRef idx="1">
+            <a:schemeClr val="accent1"/>
+          </a:fillRef>
+          <a:effectRef idx="0">
+            <a:schemeClr val="accent1"/>
+          </a:effectRef>
+          <a:fontRef idx="minor">
+            <a:schemeClr val="lt1"/>
+          </a:fontRef>
+        </p:style>
+        <p:txBody>
+          <a:bodyPr rtlCol="0" anchor="ctr"/>
+          <a:lstStyle/>
+          <a:p>
+            <a:pPr algn="ctr"/>
+            <a:endParaRPr lang="en-US"/>
           </a:p>
         </p:txBody>
       </p:sp>
@@ -17517,7 +17649,7 @@
           <p:nvPr>
             <p:extLst>
               <p:ext uri="{D42A27DB-BD31-4B8C-83A1-F6EECF244321}">
-                <p14:modId xmlns:p14="http://schemas.microsoft.com/office/powerpoint/2010/main" val="2865752158"/>
+                <p14:modId xmlns:p14="http://schemas.microsoft.com/office/powerpoint/2010/main" val="2338084903"/>
               </p:ext>
             </p:extLst>
           </p:nvPr>
@@ -17738,7 +17870,7 @@
                         <a:t>Google Gemini </a:t>
                       </a:r>
                       <a:r>
-                        <a:rPr lang="en-US" sz="1800" dirty="0">
+                        <a:rPr lang="en-US" altLang="zh-TW" sz="1800" b="0" i="0" u="none" strike="noStrike" cap="none" dirty="0">
                           <a:solidFill>
                             <a:srgbClr val="334155"/>
                           </a:solidFill>
@@ -17747,19 +17879,7 @@
                           <a:cs typeface="Lato"/>
                           <a:sym typeface="Lato"/>
                         </a:rPr>
-                        <a:t>3</a:t>
-                      </a:r>
-                      <a:r>
-                        <a:rPr lang="en-US" sz="1800" b="0" i="0" u="none" strike="noStrike" cap="none" dirty="0">
-                          <a:solidFill>
-                            <a:srgbClr val="334155"/>
-                          </a:solidFill>
-                          <a:latin typeface="Lato"/>
-                          <a:ea typeface="Lato"/>
-                          <a:cs typeface="Lato"/>
-                          <a:sym typeface="Lato"/>
-                        </a:rPr>
-                        <a:t>.5 Flash</a:t>
+                        <a:t>AI</a:t>
                       </a:r>
                       <a:endParaRPr sz="1800" dirty="0"/>
                     </a:p>
@@ -17850,7 +17970,7 @@
                         <a:buNone/>
                       </a:pPr>
                       <a:r>
-                        <a:rPr lang="en-US" sz="1800" b="0" i="0" u="none" strike="noStrike" cap="none">
+                        <a:rPr lang="en-US" sz="1800" b="0" i="0" u="none" strike="noStrike" cap="none" dirty="0">
                           <a:solidFill>
                             <a:srgbClr val="334155"/>
                           </a:solidFill>
@@ -17859,9 +17979,9 @@
                           <a:cs typeface="Lato"/>
                           <a:sym typeface="Lato"/>
                         </a:rPr>
-                        <a:t>HTML5 / CSS3 / JavaScript</a:t>
+                        <a:t>HTML5</a:t>
                       </a:r>
-                      <a:endParaRPr sz="1800"/>
+                      <a:endParaRPr sz="1800" dirty="0"/>
                     </a:p>
                   </a:txBody>
                   <a:tcPr marL="64741" marR="64741" marT="25896" marB="25896" anchor="ctr"/>
@@ -18064,10 +18184,28 @@
                         <a:buNone/>
                       </a:pPr>
                       <a:r>
-                        <a:rPr lang="en-US" sz="1800" dirty="0"/>
+                        <a:rPr lang="en-US" sz="1800" dirty="0">
+                          <a:solidFill>
+                            <a:schemeClr val="bg2">
+                              <a:lumMod val="50000"/>
+                            </a:schemeClr>
+                          </a:solidFill>
+                          <a:latin typeface="Lato" panose="020F0502020204030203" pitchFamily="34" charset="0"/>
+                          <a:ea typeface="Lato" panose="020F0502020204030203" pitchFamily="34" charset="0"/>
+                          <a:cs typeface="Lato" panose="020F0502020204030203" pitchFamily="34" charset="0"/>
+                        </a:rPr>
                         <a:t>Visual Studio Code</a:t>
                       </a:r>
-                      <a:endParaRPr sz="1800" dirty="0"/>
+                      <a:endParaRPr sz="1800" dirty="0">
+                        <a:solidFill>
+                          <a:schemeClr val="bg2">
+                            <a:lumMod val="50000"/>
+                          </a:schemeClr>
+                        </a:solidFill>
+                        <a:latin typeface="Lato" panose="020F0502020204030203" pitchFamily="34" charset="0"/>
+                        <a:ea typeface="Lato" panose="020F0502020204030203" pitchFamily="34" charset="0"/>
+                        <a:cs typeface="Lato" panose="020F0502020204030203" pitchFamily="34" charset="0"/>
+                      </a:endParaRPr>
                     </a:p>
                   </a:txBody>
                   <a:tcPr marL="64741" marR="64741" marT="25896" marB="25896" anchor="ctr"/>
@@ -18078,10 +18216,27 @@
                     <a:lstStyle/>
                     <a:p>
                       <a:r>
-                        <a:rPr lang="zh-TW" altLang="en-US" sz="1800"/>
+                        <a:rPr lang="zh-TW" altLang="en-US" sz="1800" dirty="0">
+                          <a:solidFill>
+                            <a:schemeClr val="bg2">
+                              <a:lumMod val="50000"/>
+                            </a:schemeClr>
+                          </a:solidFill>
+                          <a:latin typeface="Lato" panose="020F0502020204030203" pitchFamily="34" charset="0"/>
+                          <a:cs typeface="Lato" panose="020F0502020204030203" pitchFamily="34" charset="0"/>
+                        </a:rPr>
                         <a:t>程式開發與除錯</a:t>
                       </a:r>
-                      <a:endParaRPr sz="1800" dirty="0"/>
+                      <a:endParaRPr sz="1800" dirty="0">
+                        <a:solidFill>
+                          <a:schemeClr val="bg2">
+                            <a:lumMod val="50000"/>
+                          </a:schemeClr>
+                        </a:solidFill>
+                        <a:latin typeface="Lato" panose="020F0502020204030203" pitchFamily="34" charset="0"/>
+                        <a:ea typeface="Lato" panose="020F0502020204030203" pitchFamily="34" charset="0"/>
+                        <a:cs typeface="Lato" panose="020F0502020204030203" pitchFamily="34" charset="0"/>
+                      </a:endParaRPr>
                     </a:p>
                   </a:txBody>
                   <a:tcPr marL="64741" marR="64741" marT="25896" marB="25896" anchor="ctr"/>
@@ -18108,7 +18263,7 @@
                         <a:buNone/>
                       </a:pPr>
                       <a:r>
-                        <a:rPr lang="en-US" sz="1800" b="1" i="0" u="none" strike="noStrike" cap="none" dirty="0" err="1">
+                        <a:rPr lang="zh-TW" altLang="en-US" sz="1800" b="1" i="0" u="none" strike="noStrike" cap="none" dirty="0">
                           <a:solidFill>
                             <a:srgbClr val="334155"/>
                           </a:solidFill>
@@ -18117,7 +18272,7 @@
                           <a:cs typeface="Lato"/>
                           <a:sym typeface="Lato"/>
                         </a:rPr>
-                        <a:t>開發環境</a:t>
+                        <a:t>測試環境</a:t>
                       </a:r>
                       <a:endParaRPr sz="1800" dirty="0"/>
                     </a:p>
@@ -18426,7 +18581,7 @@
         <p:spPr>
           <a:xfrm>
             <a:off x="5029200" y="3939480"/>
-            <a:ext cx="2133600" cy="323100"/>
+            <a:ext cx="2133600" cy="517065"/>
           </a:xfrm>
           <a:prstGeom prst="rect">
             <a:avLst/>
@@ -18442,7 +18597,7 @@
           </a:bodyPr>
           <a:lstStyle/>
           <a:p>
-            <a:pPr marL="0" marR="0" lvl="0" indent="0" algn="l" rtl="0">
+            <a:pPr marL="0" marR="0" lvl="0" indent="0" algn="ctr" rtl="0">
               <a:lnSpc>
                 <a:spcPct val="159952"/>
               </a:lnSpc>
@@ -18455,7 +18610,7 @@
               <a:buNone/>
             </a:pPr>
             <a:r>
-              <a:rPr lang="en-US" sz="2100" b="0" i="0" u="none" strike="noStrike" cap="none">
+              <a:rPr lang="en-US" sz="2100" b="0" i="0" u="none" strike="noStrike" cap="none" dirty="0" err="1">
                 <a:solidFill>
                   <a:srgbClr val="FCFAF0"/>
                 </a:solidFill>
@@ -18464,9 +18619,9 @@
                 <a:cs typeface="Lato"/>
                 <a:sym typeface="Lato"/>
               </a:rPr>
-              <a:t>里程碑達成與現狀</a:t>
+              <a:t>現狀</a:t>
             </a:r>
-            <a:endParaRPr/>
+            <a:endParaRPr dirty="0"/>
           </a:p>
         </p:txBody>
       </p:sp>
